--- a/FloodView_SIH2026_PS26161.pptx
+++ b/FloodView_SIH2026_PS26161.pptx
@@ -5563,7 +5563,7 @@
                 </a:solidFill>
                 <a:latin typeface="Times New Roman"/>
               </a:rPr>
-              <a:t>JALRAKSHA</a:t>
+              <a:t>FLOODVIEW</a:t>
             </a:r>
             <a:endParaRPr lang="en-US" b="1" dirty="0">
               <a:solidFill>
@@ -5952,7 +5952,7 @@
               <a:rPr sz="3400" b="1">
                 <a:latin typeface="Times New Roman"/>
               </a:rPr>
-              <a:t>JalRaksha</a:t>
+              <a:t>FloodView</a:t>
             </a:r>
           </a:p>
         </p:txBody>
